--- a/自己紹介.pptx
+++ b/自己紹介.pptx
@@ -5,20 +5,19 @@
     <p:sldMasterId id="2147483658" r:id="rId4"/>
   </p:sldMasterIdLst>
   <p:notesMasterIdLst>
-    <p:notesMasterId r:id="rId13"/>
+    <p:notesMasterId r:id="rId12"/>
   </p:notesMasterIdLst>
   <p:handoutMasterIdLst>
-    <p:handoutMasterId r:id="rId14"/>
+    <p:handoutMasterId r:id="rId13"/>
   </p:handoutMasterIdLst>
   <p:sldIdLst>
     <p:sldId id="410" r:id="rId5"/>
     <p:sldId id="383" r:id="rId6"/>
     <p:sldId id="408" r:id="rId7"/>
     <p:sldId id="411" r:id="rId8"/>
-    <p:sldId id="412" r:id="rId9"/>
-    <p:sldId id="391" r:id="rId10"/>
-    <p:sldId id="413" r:id="rId11"/>
-    <p:sldId id="414" r:id="rId12"/>
+    <p:sldId id="391" r:id="rId9"/>
+    <p:sldId id="413" r:id="rId10"/>
+    <p:sldId id="414" r:id="rId11"/>
   </p:sldIdLst>
   <p:sldSz cx="12192000" cy="6858000"/>
   <p:notesSz cx="6858000" cy="9144000"/>
@@ -201,7 +200,7 @@
                 <a:latin typeface="Meiryo UI" panose="020B0604030504040204" pitchFamily="50" charset="-128"/>
                 <a:ea typeface="Meiryo UI" panose="020B0604030504040204" pitchFamily="50" charset="-128"/>
               </a:rPr>
-              <a:t>2025/5/7</a:t>
+              <a:t>2026/5/8</a:t>
             </a:fld>
             <a:endParaRPr lang="ja-JP" dirty="0">
               <a:latin typeface="Meiryo UI" panose="020B0604030504040204" pitchFamily="50" charset="-128"/>
@@ -444,7 +443,7 @@
               <a:rPr lang="ja-JP" altLang="en-US" smtClean="0">
                 <a:ea typeface="Meiryo UI" panose="020B0604030504040204" pitchFamily="50" charset="-128"/>
               </a:rPr>
-              <a:t>2025/5/7</a:t>
+              <a:t>2026/5/8</a:t>
             </a:fld>
             <a:endParaRPr dirty="0">
               <a:ea typeface="Meiryo UI" panose="020B0604030504040204" pitchFamily="50" charset="-128"/>
@@ -1175,133 +1174,6 @@
   <p:cSld>
     <p:spTree>
       <p:nvGrpSpPr>
-        <p:cNvPr id="1" name="">
-          <a:extLst>
-            <a:ext uri="{FF2B5EF4-FFF2-40B4-BE49-F238E27FC236}">
-              <a16:creationId xmlns:a16="http://schemas.microsoft.com/office/drawing/2014/main" id="{13840149-4764-EF26-97D2-641C320B6884}"/>
-            </a:ext>
-          </a:extLst>
-        </p:cNvPr>
-        <p:cNvGrpSpPr/>
-        <p:nvPr/>
-      </p:nvGrpSpPr>
-      <p:grpSpPr>
-        <a:xfrm>
-          <a:off x="0" y="0"/>
-          <a:ext cx="0" cy="0"/>
-          <a:chOff x="0" y="0"/>
-          <a:chExt cx="0" cy="0"/>
-        </a:xfrm>
-      </p:grpSpPr>
-      <p:sp>
-        <p:nvSpPr>
-          <p:cNvPr id="2" name="スライド イメージ プレースホルダー 1">
-            <a:extLst>
-              <a:ext uri="{FF2B5EF4-FFF2-40B4-BE49-F238E27FC236}">
-                <a16:creationId xmlns:a16="http://schemas.microsoft.com/office/drawing/2014/main" id="{C779354D-FB34-3767-861A-CB0CBE160ECB}"/>
-              </a:ext>
-            </a:extLst>
-          </p:cNvPr>
-          <p:cNvSpPr>
-            <a:spLocks noGrp="1" noRot="1" noChangeAspect="1"/>
-          </p:cNvSpPr>
-          <p:nvPr>
-            <p:ph type="sldImg"/>
-          </p:nvPr>
-        </p:nvSpPr>
-        <p:spPr/>
-      </p:sp>
-      <p:sp>
-        <p:nvSpPr>
-          <p:cNvPr id="3" name="ノート プレースホルダー 2">
-            <a:extLst>
-              <a:ext uri="{FF2B5EF4-FFF2-40B4-BE49-F238E27FC236}">
-                <a16:creationId xmlns:a16="http://schemas.microsoft.com/office/drawing/2014/main" id="{16458E03-60FC-2363-5026-7497CB0C86C0}"/>
-              </a:ext>
-            </a:extLst>
-          </p:cNvPr>
-          <p:cNvSpPr>
-            <a:spLocks noGrp="1"/>
-          </p:cNvSpPr>
-          <p:nvPr>
-            <p:ph type="body" idx="1"/>
-          </p:nvPr>
-        </p:nvSpPr>
-        <p:spPr/>
-        <p:txBody>
-          <a:bodyPr rtlCol="0"/>
-          <a:lstStyle>
-            <a:defPPr>
-              <a:defRPr lang="ja-JP"/>
-            </a:defPPr>
-          </a:lstStyle>
-          <a:p>
-            <a:pPr rtl="0"/>
-            <a:endParaRPr lang="ja-JP" dirty="0">
-              <a:latin typeface="Meiryo UI" panose="020B0604030504040204" pitchFamily="50" charset="-128"/>
-              <a:ea typeface="Meiryo UI" panose="020B0604030504040204" pitchFamily="50" charset="-128"/>
-            </a:endParaRPr>
-          </a:p>
-        </p:txBody>
-      </p:sp>
-      <p:sp>
-        <p:nvSpPr>
-          <p:cNvPr id="4" name="スライド番号プレースホルダー 3">
-            <a:extLst>
-              <a:ext uri="{FF2B5EF4-FFF2-40B4-BE49-F238E27FC236}">
-                <a16:creationId xmlns:a16="http://schemas.microsoft.com/office/drawing/2014/main" id="{C1339021-0105-AFD2-458A-BDF0B81E3DF7}"/>
-              </a:ext>
-            </a:extLst>
-          </p:cNvPr>
-          <p:cNvSpPr>
-            <a:spLocks noGrp="1"/>
-          </p:cNvSpPr>
-          <p:nvPr>
-            <p:ph type="sldNum" sz="quarter" idx="5"/>
-          </p:nvPr>
-        </p:nvSpPr>
-        <p:spPr/>
-        <p:txBody>
-          <a:bodyPr rtlCol="0"/>
-          <a:lstStyle>
-            <a:defPPr>
-              <a:defRPr lang="ja-JP"/>
-            </a:defPPr>
-          </a:lstStyle>
-          <a:p>
-            <a:pPr rtl="0"/>
-            <a:fld id="{A89C7E07-3C67-C64C-8DA0-0404F6303970}" type="slidenum">
-              <a:rPr lang="en-US" altLang="ja-JP" smtClean="0">
-                <a:latin typeface="Meiryo UI" panose="020B0604030504040204" pitchFamily="50" charset="-128"/>
-                <a:ea typeface="Meiryo UI" panose="020B0604030504040204" pitchFamily="50" charset="-128"/>
-              </a:rPr>
-              <a:t>5</a:t>
-            </a:fld>
-            <a:endParaRPr lang="ja-JP" dirty="0">
-              <a:latin typeface="Meiryo UI" panose="020B0604030504040204" pitchFamily="50" charset="-128"/>
-              <a:ea typeface="Meiryo UI" panose="020B0604030504040204" pitchFamily="50" charset="-128"/>
-            </a:endParaRPr>
-          </a:p>
-        </p:txBody>
-      </p:sp>
-    </p:spTree>
-    <p:extLst>
-      <p:ext uri="{BB962C8B-B14F-4D97-AF65-F5344CB8AC3E}">
-        <p14:creationId xmlns:p14="http://schemas.microsoft.com/office/powerpoint/2010/main" val="3689090190"/>
-      </p:ext>
-    </p:extLst>
-  </p:cSld>
-  <p:clrMapOvr>
-    <a:masterClrMapping/>
-  </p:clrMapOvr>
-</p:notes>
-</file>
-
-<file path=ppt/notesSlides/notesSlide6.xml><?xml version="1.0" encoding="utf-8"?>
-<p:notes xmlns:a="http://schemas.openxmlformats.org/drawingml/2006/main" xmlns:r="http://schemas.openxmlformats.org/officeDocument/2006/relationships" xmlns:p="http://schemas.openxmlformats.org/presentationml/2006/main">
-  <p:cSld>
-    <p:spTree>
-      <p:nvGrpSpPr>
         <p:cNvPr id="1" name=""/>
         <p:cNvGrpSpPr/>
         <p:nvPr/>
@@ -1378,7 +1250,7 @@
                 <a:latin typeface="Meiryo UI" panose="020B0604030504040204" pitchFamily="50" charset="-128"/>
                 <a:ea typeface="Meiryo UI" panose="020B0604030504040204" pitchFamily="50" charset="-128"/>
               </a:rPr>
-              <a:t>6</a:t>
+              <a:t>5</a:t>
             </a:fld>
             <a:endParaRPr lang="ja-JP" dirty="0">
               <a:latin typeface="Meiryo UI" panose="020B0604030504040204" pitchFamily="50" charset="-128"/>
@@ -1400,7 +1272,7 @@
 </p:notes>
 </file>
 
-<file path=ppt/notesSlides/notesSlide7.xml><?xml version="1.0" encoding="utf-8"?>
+<file path=ppt/notesSlides/notesSlide6.xml><?xml version="1.0" encoding="utf-8"?>
 <p:notes xmlns:a="http://schemas.openxmlformats.org/drawingml/2006/main" xmlns:r="http://schemas.openxmlformats.org/officeDocument/2006/relationships" xmlns:p="http://schemas.openxmlformats.org/presentationml/2006/main">
   <p:cSld>
     <p:spTree>
@@ -1505,7 +1377,7 @@
                 <a:latin typeface="Meiryo UI" panose="020B0604030504040204" pitchFamily="50" charset="-128"/>
                 <a:ea typeface="Meiryo UI" panose="020B0604030504040204" pitchFamily="50" charset="-128"/>
               </a:rPr>
-              <a:t>7</a:t>
+              <a:t>6</a:t>
             </a:fld>
             <a:endParaRPr lang="ja-JP" dirty="0">
               <a:latin typeface="Meiryo UI" panose="020B0604030504040204" pitchFamily="50" charset="-128"/>
@@ -1527,7 +1399,7 @@
 </p:notes>
 </file>
 
-<file path=ppt/notesSlides/notesSlide8.xml><?xml version="1.0" encoding="utf-8"?>
+<file path=ppt/notesSlides/notesSlide7.xml><?xml version="1.0" encoding="utf-8"?>
 <p:notes xmlns:a="http://schemas.openxmlformats.org/drawingml/2006/main" xmlns:r="http://schemas.openxmlformats.org/officeDocument/2006/relationships" xmlns:p="http://schemas.openxmlformats.org/presentationml/2006/main">
   <p:cSld>
     <p:spTree>
@@ -1632,7 +1504,7 @@
                 <a:latin typeface="Meiryo UI" panose="020B0604030504040204" pitchFamily="50" charset="-128"/>
                 <a:ea typeface="Meiryo UI" panose="020B0604030504040204" pitchFamily="50" charset="-128"/>
               </a:rPr>
-              <a:t>8</a:t>
+              <a:t>7</a:t>
             </a:fld>
             <a:endParaRPr lang="ja-JP" dirty="0">
               <a:latin typeface="Meiryo UI" panose="020B0604030504040204" pitchFamily="50" charset="-128"/>
@@ -10928,35 +10800,6 @@
           <a:chExt cx="0" cy="0"/>
         </a:xfrm>
       </p:grpSpPr>
-      <p:pic>
-        <p:nvPicPr>
-          <p:cNvPr id="9" name="図 8">
-            <a:extLst>
-              <a:ext uri="{FF2B5EF4-FFF2-40B4-BE49-F238E27FC236}">
-                <a16:creationId xmlns:a16="http://schemas.microsoft.com/office/drawing/2014/main" id="{06EDEC29-3EA4-5178-57CA-36656F49E55C}"/>
-              </a:ext>
-            </a:extLst>
-          </p:cNvPr>
-          <p:cNvPicPr>
-            <a:picLocks noChangeAspect="1"/>
-          </p:cNvPicPr>
-          <p:nvPr/>
-        </p:nvPicPr>
-        <p:blipFill>
-          <a:blip r:embed="rId3"/>
-          <a:srcRect t="14023" b="16577"/>
-          <a:stretch/>
-        </p:blipFill>
-        <p:spPr>
-          <a:xfrm>
-            <a:off x="844682" y="-17645"/>
-            <a:ext cx="4458789" cy="6875645"/>
-          </a:xfrm>
-          <a:prstGeom prst="rect">
-            <a:avLst/>
-          </a:prstGeom>
-        </p:spPr>
-      </p:pic>
       <p:sp>
         <p:nvSpPr>
           <p:cNvPr id="2" name="タイトル 1">
@@ -11044,7 +10887,7 @@
                   <a:schemeClr val="bg1"/>
                 </a:solidFill>
               </a:rPr>
-              <a:t>1</a:t>
+              <a:t>2</a:t>
             </a:r>
             <a:r>
               <a:rPr kumimoji="1" lang="ja-JP" altLang="en-US" sz="2800" dirty="0">
@@ -11697,76 +11540,6 @@
           </a:extLst>
         </p:spPr>
       </p:pic>
-      <p:sp>
-        <p:nvSpPr>
-          <p:cNvPr id="6" name="テキスト ボックス 5">
-            <a:extLst>
-              <a:ext uri="{FF2B5EF4-FFF2-40B4-BE49-F238E27FC236}">
-                <a16:creationId xmlns:a16="http://schemas.microsoft.com/office/drawing/2014/main" id="{E4C08F36-A3D4-9BDC-990E-09D86BFDF834}"/>
-              </a:ext>
-            </a:extLst>
-          </p:cNvPr>
-          <p:cNvSpPr txBox="1"/>
-          <p:nvPr/>
-        </p:nvSpPr>
-        <p:spPr>
-          <a:xfrm>
-            <a:off x="594360" y="6173565"/>
-            <a:ext cx="5109029" cy="646331"/>
-          </a:xfrm>
-          <a:prstGeom prst="rect">
-            <a:avLst/>
-          </a:prstGeom>
-          <a:noFill/>
-        </p:spPr>
-        <p:txBody>
-          <a:bodyPr wrap="square" rtlCol="0">
-            <a:spAutoFit/>
-          </a:bodyPr>
-          <a:lstStyle/>
-          <a:p>
-            <a:r>
-              <a:rPr kumimoji="1" lang="en-US" altLang="ja-JP" dirty="0">
-                <a:solidFill>
-                  <a:schemeClr val="bg1"/>
-                </a:solidFill>
-              </a:rPr>
-              <a:t>Creepy Nuts, King Gnu, </a:t>
-            </a:r>
-            <a:r>
-              <a:rPr kumimoji="1" lang="ja-JP" altLang="en-US" dirty="0">
-                <a:solidFill>
-                  <a:schemeClr val="bg1"/>
-                </a:solidFill>
-              </a:rPr>
-              <a:t>結束バンド</a:t>
-            </a:r>
-            <a:r>
-              <a:rPr kumimoji="1" lang="en-US" altLang="ja-JP" dirty="0">
-                <a:solidFill>
-                  <a:schemeClr val="bg1"/>
-                </a:solidFill>
-              </a:rPr>
-              <a:t>, </a:t>
-            </a:r>
-            <a:r>
-              <a:rPr kumimoji="1" lang="ja-JP" altLang="en-US" dirty="0">
-                <a:solidFill>
-                  <a:schemeClr val="bg1"/>
-                </a:solidFill>
-              </a:rPr>
-              <a:t>ツユ</a:t>
-            </a:r>
-          </a:p>
-          <a:p>
-            <a:endParaRPr kumimoji="1" lang="ja-JP" altLang="en-US" dirty="0">
-              <a:solidFill>
-                <a:schemeClr val="bg1"/>
-              </a:solidFill>
-            </a:endParaRPr>
-          </a:p>
-        </p:txBody>
-      </p:sp>
     </p:spTree>
     <p:extLst>
       <p:ext uri="{BB962C8B-B14F-4D97-AF65-F5344CB8AC3E}">
@@ -11781,290 +11554,6 @@
 </file>
 
 <file path=ppt/slides/slide5.xml><?xml version="1.0" encoding="utf-8"?>
-<p:sld xmlns:a="http://schemas.openxmlformats.org/drawingml/2006/main" xmlns:r="http://schemas.openxmlformats.org/officeDocument/2006/relationships" xmlns:p="http://schemas.openxmlformats.org/presentationml/2006/main">
-  <p:cSld>
-    <p:spTree>
-      <p:nvGrpSpPr>
-        <p:cNvPr id="1" name="">
-          <a:extLst>
-            <a:ext uri="{FF2B5EF4-FFF2-40B4-BE49-F238E27FC236}">
-              <a16:creationId xmlns:a16="http://schemas.microsoft.com/office/drawing/2014/main" id="{2D1796D8-724E-CE06-3715-5009B555ED35}"/>
-            </a:ext>
-          </a:extLst>
-        </p:cNvPr>
-        <p:cNvGrpSpPr/>
-        <p:nvPr/>
-      </p:nvGrpSpPr>
-      <p:grpSpPr>
-        <a:xfrm>
-          <a:off x="0" y="0"/>
-          <a:ext cx="0" cy="0"/>
-          <a:chOff x="0" y="0"/>
-          <a:chExt cx="0" cy="0"/>
-        </a:xfrm>
-      </p:grpSpPr>
-      <p:sp>
-        <p:nvSpPr>
-          <p:cNvPr id="2" name="タイトル 1">
-            <a:extLst>
-              <a:ext uri="{FF2B5EF4-FFF2-40B4-BE49-F238E27FC236}">
-                <a16:creationId xmlns:a16="http://schemas.microsoft.com/office/drawing/2014/main" id="{63528FE0-3869-3D6B-EF8F-66DD09F56CCE}"/>
-              </a:ext>
-            </a:extLst>
-          </p:cNvPr>
-          <p:cNvSpPr>
-            <a:spLocks noGrp="1"/>
-          </p:cNvSpPr>
-          <p:nvPr>
-            <p:ph type="title"/>
-          </p:nvPr>
-        </p:nvSpPr>
-        <p:spPr>
-          <a:xfrm>
-            <a:off x="594361" y="278129"/>
-            <a:ext cx="8909858" cy="1494596"/>
-          </a:xfrm>
-        </p:spPr>
-        <p:txBody>
-          <a:bodyPr rtlCol="0"/>
-          <a:lstStyle>
-            <a:defPPr>
-              <a:defRPr lang="ja-JP"/>
-            </a:defPPr>
-          </a:lstStyle>
-          <a:p>
-            <a:pPr rtl="0">
-              <a:lnSpc>
-                <a:spcPct val="90000"/>
-              </a:lnSpc>
-            </a:pPr>
-            <a:r>
-              <a:rPr lang="ja-JP" altLang="en-US" dirty="0"/>
-              <a:t>ゲーム</a:t>
-            </a:r>
-            <a:endParaRPr lang="ja-JP" dirty="0"/>
-          </a:p>
-        </p:txBody>
-      </p:sp>
-      <p:sp>
-        <p:nvSpPr>
-          <p:cNvPr id="3" name="コンテンツ プレースホルダー 2">
-            <a:extLst>
-              <a:ext uri="{FF2B5EF4-FFF2-40B4-BE49-F238E27FC236}">
-                <a16:creationId xmlns:a16="http://schemas.microsoft.com/office/drawing/2014/main" id="{9D511258-0691-C225-EEC0-354AE5C73C43}"/>
-              </a:ext>
-            </a:extLst>
-          </p:cNvPr>
-          <p:cNvSpPr>
-            <a:spLocks noGrp="1"/>
-          </p:cNvSpPr>
-          <p:nvPr>
-            <p:ph sz="quarter" idx="15"/>
-          </p:nvPr>
-        </p:nvSpPr>
-        <p:spPr>
-          <a:xfrm>
-            <a:off x="594360" y="2676525"/>
-            <a:ext cx="9696269" cy="3067731"/>
-          </a:xfrm>
-        </p:spPr>
-        <p:txBody>
-          <a:bodyPr rtlCol="0" anchor="ctr">
-            <a:normAutofit/>
-          </a:bodyPr>
-          <a:lstStyle>
-            <a:defPPr>
-              <a:defRPr lang="ja-JP"/>
-            </a:defPPr>
-          </a:lstStyle>
-          <a:p>
-            <a:pPr marL="342900" indent="-342900" rtl="0">
-              <a:buFont typeface="Arial" panose="020B0604020202020204" pitchFamily="34" charset="0"/>
-              <a:buChar char="•"/>
-            </a:pPr>
-            <a:r>
-              <a:rPr lang="en-US" altLang="ja-JP" sz="4000" dirty="0" err="1"/>
-              <a:t>Factorio</a:t>
-            </a:r>
-            <a:endParaRPr lang="en-US" altLang="ja-JP" sz="4000" dirty="0"/>
-          </a:p>
-          <a:p>
-            <a:pPr marL="342900" indent="-342900" rtl="0">
-              <a:buFont typeface="Arial" panose="020B0604020202020204" pitchFamily="34" charset="0"/>
-              <a:buChar char="•"/>
-            </a:pPr>
-            <a:r>
-              <a:rPr lang="en-US" altLang="ja-JP" sz="4000" dirty="0"/>
-              <a:t>Overwatch2</a:t>
-            </a:r>
-          </a:p>
-          <a:p>
-            <a:pPr marL="342900" indent="-342900" rtl="0">
-              <a:buFont typeface="Arial" panose="020B0604020202020204" pitchFamily="34" charset="0"/>
-              <a:buChar char="•"/>
-            </a:pPr>
-            <a:r>
-              <a:rPr lang="ja-JP" altLang="en-US" sz="4000" dirty="0"/>
-              <a:t>学園アイドルマスター</a:t>
-            </a:r>
-          </a:p>
-        </p:txBody>
-      </p:sp>
-      <p:pic>
-        <p:nvPicPr>
-          <p:cNvPr id="4098" name="Picture 2">
-            <a:extLst>
-              <a:ext uri="{FF2B5EF4-FFF2-40B4-BE49-F238E27FC236}">
-                <a16:creationId xmlns:a16="http://schemas.microsoft.com/office/drawing/2014/main" id="{41BEEEB1-9575-3706-F903-F50AA80B35F6}"/>
-              </a:ext>
-            </a:extLst>
-          </p:cNvPr>
-          <p:cNvPicPr>
-            <a:picLocks noChangeAspect="1" noChangeArrowheads="1"/>
-          </p:cNvPicPr>
-          <p:nvPr/>
-        </p:nvPicPr>
-        <p:blipFill>
-          <a:blip r:embed="rId3">
-            <a:extLst>
-              <a:ext uri="{28A0092B-C50C-407E-A947-70E740481C1C}">
-                <a14:useLocalDpi xmlns:a14="http://schemas.microsoft.com/office/drawing/2010/main" val="0"/>
-              </a:ext>
-            </a:extLst>
-          </a:blip>
-          <a:srcRect/>
-          <a:stretch>
-            <a:fillRect/>
-          </a:stretch>
-        </p:blipFill>
-        <p:spPr bwMode="auto">
-          <a:xfrm>
-            <a:off x="6301014" y="407983"/>
-            <a:ext cx="4381500" cy="2047875"/>
-          </a:xfrm>
-          <a:prstGeom prst="rect">
-            <a:avLst/>
-          </a:prstGeom>
-          <a:noFill/>
-          <a:extLst>
-            <a:ext uri="{909E8E84-426E-40DD-AFC4-6F175D3DCCD1}">
-              <a14:hiddenFill xmlns:a14="http://schemas.microsoft.com/office/drawing/2010/main">
-                <a:solidFill>
-                  <a:srgbClr val="FFFFFF"/>
-                </a:solidFill>
-              </a14:hiddenFill>
-            </a:ext>
-          </a:extLst>
-        </p:spPr>
-      </p:pic>
-      <p:pic>
-        <p:nvPicPr>
-          <p:cNvPr id="4100" name="Picture 4">
-            <a:extLst>
-              <a:ext uri="{FF2B5EF4-FFF2-40B4-BE49-F238E27FC236}">
-                <a16:creationId xmlns:a16="http://schemas.microsoft.com/office/drawing/2014/main" id="{7D7184BD-32F4-479F-E112-B87E8366D489}"/>
-              </a:ext>
-            </a:extLst>
-          </p:cNvPr>
-          <p:cNvPicPr>
-            <a:picLocks noChangeAspect="1" noChangeArrowheads="1"/>
-          </p:cNvPicPr>
-          <p:nvPr/>
-        </p:nvPicPr>
-        <p:blipFill>
-          <a:blip r:embed="rId4">
-            <a:extLst>
-              <a:ext uri="{28A0092B-C50C-407E-A947-70E740481C1C}">
-                <a14:useLocalDpi xmlns:a14="http://schemas.microsoft.com/office/drawing/2010/main" val="0"/>
-              </a:ext>
-            </a:extLst>
-          </a:blip>
-          <a:srcRect/>
-          <a:stretch>
-            <a:fillRect/>
-          </a:stretch>
-        </p:blipFill>
-        <p:spPr bwMode="auto">
-          <a:xfrm>
-            <a:off x="6511042" y="2531323"/>
-            <a:ext cx="3961444" cy="2228312"/>
-          </a:xfrm>
-          <a:prstGeom prst="rect">
-            <a:avLst/>
-          </a:prstGeom>
-          <a:noFill/>
-          <a:extLst>
-            <a:ext uri="{909E8E84-426E-40DD-AFC4-6F175D3DCCD1}">
-              <a14:hiddenFill xmlns:a14="http://schemas.microsoft.com/office/drawing/2010/main">
-                <a:solidFill>
-                  <a:srgbClr val="FFFFFF"/>
-                </a:solidFill>
-              </a14:hiddenFill>
-            </a:ext>
-          </a:extLst>
-        </p:spPr>
-      </p:pic>
-      <p:pic>
-        <p:nvPicPr>
-          <p:cNvPr id="4102" name="Picture 6">
-            <a:extLst>
-              <a:ext uri="{FF2B5EF4-FFF2-40B4-BE49-F238E27FC236}">
-                <a16:creationId xmlns:a16="http://schemas.microsoft.com/office/drawing/2014/main" id="{02A4451F-88DA-2051-9E9D-8E89A917A8F5}"/>
-              </a:ext>
-            </a:extLst>
-          </p:cNvPr>
-          <p:cNvPicPr>
-            <a:picLocks noChangeAspect="1" noChangeArrowheads="1"/>
-          </p:cNvPicPr>
-          <p:nvPr/>
-        </p:nvPicPr>
-        <p:blipFill>
-          <a:blip r:embed="rId5">
-            <a:extLst>
-              <a:ext uri="{28A0092B-C50C-407E-A947-70E740481C1C}">
-                <a14:useLocalDpi xmlns:a14="http://schemas.microsoft.com/office/drawing/2010/main" val="0"/>
-              </a:ext>
-            </a:extLst>
-          </a:blip>
-          <a:srcRect/>
-          <a:stretch>
-            <a:fillRect/>
-          </a:stretch>
-        </p:blipFill>
-        <p:spPr bwMode="auto">
-          <a:xfrm>
-            <a:off x="5740537" y="4835100"/>
-            <a:ext cx="5502454" cy="1567465"/>
-          </a:xfrm>
-          <a:prstGeom prst="rect">
-            <a:avLst/>
-          </a:prstGeom>
-          <a:noFill/>
-          <a:extLst>
-            <a:ext uri="{909E8E84-426E-40DD-AFC4-6F175D3DCCD1}">
-              <a14:hiddenFill xmlns:a14="http://schemas.microsoft.com/office/drawing/2010/main">
-                <a:solidFill>
-                  <a:srgbClr val="FFFFFF"/>
-                </a:solidFill>
-              </a14:hiddenFill>
-            </a:ext>
-          </a:extLst>
-        </p:spPr>
-      </p:pic>
-    </p:spTree>
-    <p:extLst>
-      <p:ext uri="{BB962C8B-B14F-4D97-AF65-F5344CB8AC3E}">
-        <p14:creationId xmlns:p14="http://schemas.microsoft.com/office/powerpoint/2010/main" val="1053648958"/>
-      </p:ext>
-    </p:extLst>
-  </p:cSld>
-  <p:clrMapOvr>
-    <a:masterClrMapping/>
-  </p:clrMapOvr>
-</p:sld>
-</file>
-
-<file path=ppt/slides/slide6.xml><?xml version="1.0" encoding="utf-8"?>
 <p:sld xmlns:a="http://schemas.openxmlformats.org/drawingml/2006/main" xmlns:r="http://schemas.openxmlformats.org/officeDocument/2006/relationships" xmlns:p="http://schemas.openxmlformats.org/presentationml/2006/main">
   <p:cSld>
     <p:spTree>
@@ -12577,7 +12066,7 @@
 </p:sld>
 </file>
 
-<file path=ppt/slides/slide7.xml><?xml version="1.0" encoding="utf-8"?>
+<file path=ppt/slides/slide6.xml><?xml version="1.0" encoding="utf-8"?>
 <p:sld xmlns:a="http://schemas.openxmlformats.org/drawingml/2006/main" xmlns:r="http://schemas.openxmlformats.org/officeDocument/2006/relationships" xmlns:p="http://schemas.openxmlformats.org/presentationml/2006/main">
   <p:cSld>
     <p:spTree>
@@ -13122,7 +12611,7 @@
 </p:sld>
 </file>
 
-<file path=ppt/slides/slide8.xml><?xml version="1.0" encoding="utf-8"?>
+<file path=ppt/slides/slide7.xml><?xml version="1.0" encoding="utf-8"?>
 <p:sld xmlns:a="http://schemas.openxmlformats.org/drawingml/2006/main" xmlns:r="http://schemas.openxmlformats.org/officeDocument/2006/relationships" xmlns:p="http://schemas.openxmlformats.org/presentationml/2006/main">
   <p:cSld>
     <p:spTree>
@@ -14386,6 +13875,26 @@
 </file>
 
 <file path=customXml/item1.xml><?xml version="1.0" encoding="utf-8"?>
+<p:properties xmlns:p="http://schemas.microsoft.com/office/2006/metadata/properties" xmlns:xsi="http://www.w3.org/2001/XMLSchema-instance" xmlns:pc="http://schemas.microsoft.com/office/infopath/2007/PartnerControls">
+  <documentManagement>
+    <Background xmlns="71af3243-3dd4-4a8d-8c0d-dd76da1f02a5">false</Background>
+    <Status xmlns="71af3243-3dd4-4a8d-8c0d-dd76da1f02a5">Not started</Status>
+    <_ip_UnifiedCompliancePolicyUIAction xmlns="http://schemas.microsoft.com/sharepoint/v3" xsi:nil="true"/>
+    <Image xmlns="71af3243-3dd4-4a8d-8c0d-dd76da1f02a5">
+      <Url xsi:nil="true"/>
+      <Description xsi:nil="true"/>
+    </Image>
+    <_ip_UnifiedCompliancePolicyProperties xmlns="http://schemas.microsoft.com/sharepoint/v3" xsi:nil="true"/>
+    <ImageTagsTaxHTField xmlns="71af3243-3dd4-4a8d-8c0d-dd76da1f02a5">
+      <Terms xmlns="http://schemas.microsoft.com/office/infopath/2007/PartnerControls"/>
+    </ImageTagsTaxHTField>
+    <TaxCatchAll xmlns="230e9df3-be65-4c73-a93b-d1236ebd677e" xsi:nil="true"/>
+    <MediaServiceKeyPoints xmlns="71af3243-3dd4-4a8d-8c0d-dd76da1f02a5" xsi:nil="true"/>
+  </documentManagement>
+</p:properties>
+</file>
+
+<file path=customXml/item2.xml><?xml version="1.0" encoding="utf-8"?>
 <ct:contentTypeSchema xmlns:ct="http://schemas.microsoft.com/office/2006/metadata/contentType" xmlns:ma="http://schemas.microsoft.com/office/2006/metadata/properties/metaAttributes" ct:_="" ma:_="" ma:contentTypeName="Document" ma:contentTypeID="0x01010079F111ED35F8CC479449609E8A0923A6" ma:contentTypeVersion="28" ma:contentTypeDescription="Create a new document." ma:contentTypeScope="" ma:versionID="60f5a4f2d2b0abadcf532d48ebf9cb71">
   <xsd:schema xmlns:xsd="http://www.w3.org/2001/XMLSchema" xmlns:xs="http://www.w3.org/2001/XMLSchema" xmlns:p="http://schemas.microsoft.com/office/2006/metadata/properties" xmlns:ns1="http://schemas.microsoft.com/sharepoint/v3" xmlns:ns2="71af3243-3dd4-4a8d-8c0d-dd76da1f02a5" xmlns:ns3="16c05727-aa75-4e4a-9b5f-8a80a1165891" xmlns:ns4="230e9df3-be65-4c73-a93b-d1236ebd677e" targetNamespace="http://schemas.microsoft.com/office/2006/metadata/properties" ma:root="true" ma:fieldsID="7dd78129e6a1811f84807ad11c651531" ns1:_="" ns2:_="" ns3:_="" ns4:_="">
     <xsd:import namespace="http://schemas.microsoft.com/sharepoint/v3"/>
@@ -14697,26 +14206,6 @@
 </ct:contentTypeSchema>
 </file>
 
-<file path=customXml/item2.xml><?xml version="1.0" encoding="utf-8"?>
-<p:properties xmlns:p="http://schemas.microsoft.com/office/2006/metadata/properties" xmlns:xsi="http://www.w3.org/2001/XMLSchema-instance" xmlns:pc="http://schemas.microsoft.com/office/infopath/2007/PartnerControls">
-  <documentManagement>
-    <Background xmlns="71af3243-3dd4-4a8d-8c0d-dd76da1f02a5">false</Background>
-    <Status xmlns="71af3243-3dd4-4a8d-8c0d-dd76da1f02a5">Not started</Status>
-    <_ip_UnifiedCompliancePolicyUIAction xmlns="http://schemas.microsoft.com/sharepoint/v3" xsi:nil="true"/>
-    <Image xmlns="71af3243-3dd4-4a8d-8c0d-dd76da1f02a5">
-      <Url xsi:nil="true"/>
-      <Description xsi:nil="true"/>
-    </Image>
-    <_ip_UnifiedCompliancePolicyProperties xmlns="http://schemas.microsoft.com/sharepoint/v3" xsi:nil="true"/>
-    <ImageTagsTaxHTField xmlns="71af3243-3dd4-4a8d-8c0d-dd76da1f02a5">
-      <Terms xmlns="http://schemas.microsoft.com/office/infopath/2007/PartnerControls"/>
-    </ImageTagsTaxHTField>
-    <TaxCatchAll xmlns="230e9df3-be65-4c73-a93b-d1236ebd677e" xsi:nil="true"/>
-    <MediaServiceKeyPoints xmlns="71af3243-3dd4-4a8d-8c0d-dd76da1f02a5" xsi:nil="true"/>
-  </documentManagement>
-</p:properties>
-</file>
-
 <file path=customXml/item3.xml><?xml version="1.0" encoding="utf-8"?>
 <?mso-contentType ?>
 <FormTemplates xmlns="http://schemas.microsoft.com/sharepoint/v3/contenttype/forms">
@@ -14727,6 +14216,18 @@
 </file>
 
 <file path=customXml/itemProps1.xml><?xml version="1.0" encoding="utf-8"?>
+<ds:datastoreItem xmlns:ds="http://schemas.openxmlformats.org/officeDocument/2006/customXml" ds:itemID="{4F4B194E-8B30-4377-8C59-ECFB902D2A26}">
+  <ds:schemaRefs>
+    <ds:schemaRef ds:uri="http://schemas.microsoft.com/office/2006/metadata/properties"/>
+    <ds:schemaRef ds:uri="http://schemas.microsoft.com/office/infopath/2007/PartnerControls"/>
+    <ds:schemaRef ds:uri="71af3243-3dd4-4a8d-8c0d-dd76da1f02a5"/>
+    <ds:schemaRef ds:uri="http://schemas.microsoft.com/sharepoint/v3"/>
+    <ds:schemaRef ds:uri="230e9df3-be65-4c73-a93b-d1236ebd677e"/>
+  </ds:schemaRefs>
+</ds:datastoreItem>
+</file>
+
+<file path=customXml/itemProps2.xml><?xml version="1.0" encoding="utf-8"?>
 <ds:datastoreItem xmlns:ds="http://schemas.openxmlformats.org/officeDocument/2006/customXml" ds:itemID="{92DB9E12-8AC3-4138-BF4D-720A5525AB10}">
   <ds:schemaRefs>
     <ds:schemaRef ds:uri="http://schemas.microsoft.com/office/2006/metadata/contentType"/>
@@ -14747,18 +14248,6 @@
 </ds:datastoreItem>
 </file>
 
-<file path=customXml/itemProps2.xml><?xml version="1.0" encoding="utf-8"?>
-<ds:datastoreItem xmlns:ds="http://schemas.openxmlformats.org/officeDocument/2006/customXml" ds:itemID="{4F4B194E-8B30-4377-8C59-ECFB902D2A26}">
-  <ds:schemaRefs>
-    <ds:schemaRef ds:uri="http://schemas.microsoft.com/office/2006/metadata/properties"/>
-    <ds:schemaRef ds:uri="http://schemas.microsoft.com/office/infopath/2007/PartnerControls"/>
-    <ds:schemaRef ds:uri="71af3243-3dd4-4a8d-8c0d-dd76da1f02a5"/>
-    <ds:schemaRef ds:uri="http://schemas.microsoft.com/sharepoint/v3"/>
-    <ds:schemaRef ds:uri="230e9df3-be65-4c73-a93b-d1236ebd677e"/>
-  </ds:schemaRefs>
-</ds:datastoreItem>
-</file>
-
 <file path=customXml/itemProps3.xml><?xml version="1.0" encoding="utf-8"?>
 <ds:datastoreItem xmlns:ds="http://schemas.openxmlformats.org/officeDocument/2006/customXml" ds:itemID="{C21FFAC0-05A2-416A-B06C-C248395482CF}">
   <ds:schemaRefs>
